--- a/workshop/practice-3-pptx/sample.pptx
+++ b/workshop/practice-3-pptx/sample.pptx
@@ -506,12 +506,24 @@
           <a:lstStyle/>
           <a:p>
             <a:r>
-              <a:t>원본 1번 슬라이드 · 표지 — GO-TO TUNA</a:t>
-            </a:r>
-          </a:p>
+              <a:t>표지 — PINCH / DAILY CHEW</a:t>
+            </a:r>
+          </a:p>
+          <a:p>
+            <a:r>
+              <a:t>워드마크 + 대괄호 정의 + 브랜드 마크</a:t>
+            </a:r>
+          </a:p>
+          <a:p/>
           <a:p>
             <a:r>
               <a:t>이 샘플은 형식·디자인 규칙을 읽기 위한 참조용 렌더 이미지입니다. 텍스트는 이미지에 포함되어 있으므로 복사할 수 없습니다 — 규칙을 눈으로 읽어 언어로 정리하는 것이 실습 3의 첫 단계입니다.</a:t>
+            </a:r>
+          </a:p>
+          <a:p/>
+          <a:p>
+            <a:r>
+              <a:t>가상 브랜드 '핀치(PINCH)'의 반려견 덴탈 츄 '데일리츄' 제안서입니다. 브랜드·수치·주장은 모두 가공된 것입니다.</a:t>
             </a:r>
           </a:p>
         </p:txBody>
@@ -581,12 +593,24 @@
           <a:lstStyle/>
           <a:p>
             <a:r>
-              <a:t>원본 3번 슬라이드 · 02 시장 분석</a:t>
-            </a:r>
-          </a:p>
+              <a:t>02 시장 분석</a:t>
+            </a:r>
+          </a:p>
+          <a:p>
+            <a:r>
+              <a:t>대제목 + 3열 스탯 카드(원형 아이콘·수치·캡션) + 브러시 배너</a:t>
+            </a:r>
+          </a:p>
+          <a:p/>
           <a:p>
             <a:r>
               <a:t>이 샘플은 형식·디자인 규칙을 읽기 위한 참조용 렌더 이미지입니다. 텍스트는 이미지에 포함되어 있으므로 복사할 수 없습니다 — 규칙을 눈으로 읽어 언어로 정리하는 것이 실습 3의 첫 단계입니다.</a:t>
+            </a:r>
+          </a:p>
+          <a:p/>
+          <a:p>
+            <a:r>
+              <a:t>가상 브랜드 '핀치(PINCH)'의 반려견 덴탈 츄 '데일리츄' 제안서입니다. 브랜드·수치·주장은 모두 가공된 것입니다.</a:t>
             </a:r>
           </a:p>
         </p:txBody>
@@ -656,12 +680,24 @@
           <a:lstStyle/>
           <a:p>
             <a:r>
-              <a:t>원본 4번 슬라이드 · 03 제품 분석</a:t>
-            </a:r>
-          </a:p>
+              <a:t>03 제품 분석</a:t>
+            </a:r>
+          </a:p>
+          <a:p>
+            <a:r>
+              <a:t>좌측 대제목 + 2열 카드(번호 원형·헤딩·아이콘 행) + 하단 강조 바</a:t>
+            </a:r>
+          </a:p>
+          <a:p/>
           <a:p>
             <a:r>
               <a:t>이 샘플은 형식·디자인 규칙을 읽기 위한 참조용 렌더 이미지입니다. 텍스트는 이미지에 포함되어 있으므로 복사할 수 없습니다 — 규칙을 눈으로 읽어 언어로 정리하는 것이 실습 3의 첫 단계입니다.</a:t>
+            </a:r>
+          </a:p>
+          <a:p/>
+          <a:p>
+            <a:r>
+              <a:t>가상 브랜드 '핀치(PINCH)'의 반려견 덴탈 츄 '데일리츄' 제안서입니다. 브랜드·수치·주장은 모두 가공된 것입니다.</a:t>
             </a:r>
           </a:p>
         </p:txBody>
@@ -731,12 +767,24 @@
           <a:lstStyle/>
           <a:p>
             <a:r>
-              <a:t>원본 6번 슬라이드 · KEY CONCEPT — NO SAUCE</a:t>
-            </a:r>
-          </a:p>
+              <a:t>KEY CONCEPT</a:t>
+            </a:r>
+          </a:p>
+          <a:p>
+            <a:r>
+              <a:t>대형 타이포 1개 + 보조 문구 + 제품 일러스트</a:t>
+            </a:r>
+          </a:p>
+          <a:p/>
           <a:p>
             <a:r>
               <a:t>이 샘플은 형식·디자인 규칙을 읽기 위한 참조용 렌더 이미지입니다. 텍스트는 이미지에 포함되어 있으므로 복사할 수 없습니다 — 규칙을 눈으로 읽어 언어로 정리하는 것이 실습 3의 첫 단계입니다.</a:t>
+            </a:r>
+          </a:p>
+          <a:p/>
+          <a:p>
+            <a:r>
+              <a:t>가상 브랜드 '핀치(PINCH)'의 반려견 덴탈 츄 '데일리츄' 제안서입니다. 브랜드·수치·주장은 모두 가공된 것입니다.</a:t>
             </a:r>
           </a:p>
         </p:txBody>
@@ -806,12 +854,24 @@
           <a:lstStyle/>
           <a:p>
             <a:r>
-              <a:t>원본 9번 슬라이드 · 09 광고 효과</a:t>
-            </a:r>
-          </a:p>
+              <a:t>04 캠페인 효과</a:t>
+            </a:r>
+          </a:p>
+          <a:p>
+            <a:r>
+              <a:t>3열 번호 카드(아이콘·헤딩·캡션) + 하단 결론 라인</a:t>
+            </a:r>
+          </a:p>
+          <a:p/>
           <a:p>
             <a:r>
               <a:t>이 샘플은 형식·디자인 규칙을 읽기 위한 참조용 렌더 이미지입니다. 텍스트는 이미지에 포함되어 있으므로 복사할 수 없습니다 — 규칙을 눈으로 읽어 언어로 정리하는 것이 실습 3의 첫 단계입니다.</a:t>
+            </a:r>
+          </a:p>
+          <a:p/>
+          <a:p>
+            <a:r>
+              <a:t>가상 브랜드 '핀치(PINCH)'의 반려견 덴탈 츄 '데일리츄' 제안서입니다. 브랜드·수치·주장은 모두 가공된 것입니다.</a:t>
             </a:r>
           </a:p>
         </p:txBody>
@@ -3861,7 +3921,7 @@
       <p:grpSpPr/>
       <p:pic>
         <p:nvPicPr>
-          <p:cNvPr id="2" name="Picture 1" descr="s03.jpg"/>
+          <p:cNvPr id="2" name="Picture 1" descr="s02.jpg"/>
           <p:cNvPicPr>
             <a:picLocks noChangeAspect="1"/>
           </p:cNvPicPr>
@@ -3903,7 +3963,7 @@
       <p:grpSpPr/>
       <p:pic>
         <p:nvPicPr>
-          <p:cNvPr id="2" name="Picture 1" descr="s04.jpg"/>
+          <p:cNvPr id="2" name="Picture 1" descr="s03.jpg"/>
           <p:cNvPicPr>
             <a:picLocks noChangeAspect="1"/>
           </p:cNvPicPr>
@@ -3945,7 +4005,7 @@
       <p:grpSpPr/>
       <p:pic>
         <p:nvPicPr>
-          <p:cNvPr id="2" name="Picture 1" descr="s06.jpg"/>
+          <p:cNvPr id="2" name="Picture 1" descr="s04.jpg"/>
           <p:cNvPicPr>
             <a:picLocks noChangeAspect="1"/>
           </p:cNvPicPr>
@@ -3987,7 +4047,7 @@
       <p:grpSpPr/>
       <p:pic>
         <p:nvPicPr>
-          <p:cNvPr id="2" name="Picture 1" descr="s09.jpg"/>
+          <p:cNvPr id="2" name="Picture 1" descr="s05.jpg"/>
           <p:cNvPicPr>
             <a:picLocks noChangeAspect="1"/>
           </p:cNvPicPr>
